--- a/docs/proposal/local_llm_proposal_v2.pptx
+++ b/docs/proposal/local_llm_proposal_v2.pptx
@@ -114,42 +114,42 @@
   <p:extLst>
     <p:ext uri="{521415D9-36F7-43E2-AB2F-B90AF26B5E84}">
       <p14:sectionLst xmlns:p14="http://schemas.microsoft.com/office/powerpoint/2010/main">
-        <p14:section name="表紙" id="{a8cbc27c-cb83-49a8-40fa-9855a52bf2bb}">
+        <p14:section name="表紙" id="{49deb23b-9cf0-ac19-ac24-986bf7e665b0}">
           <p14:sldIdLst>
             <p14:sldId id="256"/>
           </p14:sldIdLst>
         </p14:section>
-        <p14:section name="01. エグゼクティブサマリー" id="{4d02eb29-439a-2259-d12a-ec4bfb8618fb}">
+        <p14:section name="01. エグゼクティブサマリー" id="{afd5d012-2f9c-b340-12aa-8132c0a6cc27}">
           <p14:sldIdLst>
             <p14:sldId id="257"/>
           </p14:sldIdLst>
         </p14:section>
-        <p14:section name="02. ローカルLLM比較" id="{506cd134-b357-edb2-af2b-01617c449472}">
+        <p14:section name="02. ローカルLLM比較" id="{6698cebe-60d2-bfeb-c14d-d2ef6561682f}">
           <p14:sldIdLst>
             <p14:sldId id="258"/>
           </p14:sldIdLst>
         </p14:section>
-        <p14:section name="03. 推奨PC・ハードウェア構成（デスクトップ）" id="{a256d495-6ea4-6ba3-ad16-35e8cd819c42}">
+        <p14:section name="03. 推奨PC・ハードウェア構成（デスクトップ）" id="{425327ce-7ce1-4722-e3d0-5947599e0dd6}">
           <p14:sldIdLst>
             <p14:sldId id="259"/>
           </p14:sldIdLst>
         </p14:section>
-        <p14:section name="04. ノートPC構成（オプション）" id="{edebc673-4c95-e082-0a79-a3b1196d44a6}">
+        <p14:section name="04. ノートPC構成（オプション）" id="{7fc746c1-3564-915d-2919-e53962a0062e}">
           <p14:sldIdLst>
             <p14:sldId id="260"/>
           </p14:sldIdLst>
         </p14:section>
-        <p14:section name="05. 保守AIチャットUI・システムイメージ" id="{4720001d-a759-56fe-b988-ef92fc52148a}">
+        <p14:section name="05. 保守AIチャットUI・システムイメージ" id="{63408304-0604-d51a-54d1-7e97a987358c}">
           <p14:sldIdLst>
             <p14:sldId id="261"/>
           </p14:sldIdLst>
         </p14:section>
-        <p14:section name="06. 概算費用および導入スケジュール" id="{26ee594a-dce7-b055-93f5-1363efee5843}">
+        <p14:section name="06. 概算費用および導入スケジュール" id="{6e6b1239-2a9d-cb82-6101-9e7784189184}">
           <p14:sldIdLst>
             <p14:sldId id="262"/>
           </p14:sldIdLst>
         </p14:section>
-        <p14:section name="07. 本提案の優位性と期待効果" id="{4b495c87-38d1-abdb-bf67-1ea41813167b}">
+        <p14:section name="07. 本提案の優位性と期待効果" id="{6c784d14-a32c-4641-5ea7-00a7acff8e89}">
           <p14:sldIdLst>
             <p14:sldId id="263"/>
           </p14:sldIdLst>
@@ -3227,7 +3227,7 @@
                   </a:tcPr>
                 </a:tc>
               </a:tr>
-              <a:tr h="839724">
+              <a:tr h="956310">
                 <a:tc>
                   <a:txBody>
                     <a:bodyPr/>
@@ -3777,7 +3777,7 @@
                   </a:tcPr>
                 </a:tc>
               </a:tr>
-              <a:tr h="666369">
+              <a:tr h="762952">
                 <a:tc>
                   <a:txBody>
                     <a:bodyPr/>
@@ -4303,7 +4303,7 @@
                   </a:tcPr>
                 </a:tc>
               </a:tr>
-              <a:tr h="839724">
+              <a:tr h="956310">
                 <a:tc>
                   <a:txBody>
                     <a:bodyPr/>
@@ -4829,7 +4829,7 @@
                   </a:tcPr>
                 </a:tc>
               </a:tr>
-              <a:tr h="666369">
+              <a:tr h="762952">
                 <a:tc>
                   <a:txBody>
                     <a:bodyPr/>
@@ -6892,7 +6892,7 @@
                   </a:tcPr>
                 </a:tc>
               </a:tr>
-              <a:tr h="493014">
+              <a:tr h="569595">
                 <a:tc>
                   <a:txBody>
                     <a:bodyPr/>
@@ -7166,7 +7166,7 @@
                   </a:tcPr>
                 </a:tc>
               </a:tr>
-              <a:tr h="666369">
+              <a:tr h="762952">
                 <a:tc>
                   <a:txBody>
                     <a:bodyPr/>
@@ -7464,7 +7464,7 @@
                   </a:tcPr>
                 </a:tc>
               </a:tr>
-              <a:tr h="666369">
+              <a:tr h="762952">
                 <a:tc>
                   <a:txBody>
                     <a:bodyPr/>
@@ -7762,7 +7762,7 @@
                   </a:tcPr>
                 </a:tc>
               </a:tr>
-              <a:tr h="493014">
+              <a:tr h="569595">
                 <a:tc>
                   <a:txBody>
                     <a:bodyPr/>
@@ -8048,12 +8048,12 @@
         </p:nvSpPr>
         <p:spPr>
           <a:xfrm>
-            <a:off x="530352" y="4403598"/>
-            <a:ext cx="5464912" cy="1806512"/>
+            <a:off x="530352" y="4749927"/>
+            <a:ext cx="5464912" cy="1605153"/>
           </a:xfrm>
           <a:prstGeom prst="roundRect">
             <a:avLst>
-              <a:gd name="adj" fmla="val 5062"/>
+              <a:gd name="adj" fmla="val 5697"/>
             </a:avLst>
           </a:prstGeom>
           <a:solidFill>
@@ -8082,7 +8082,7 @@
         </p:nvSpPr>
         <p:spPr>
           <a:xfrm>
-            <a:off x="694944" y="4568190"/>
+            <a:off x="694944" y="4914519"/>
             <a:ext cx="5135728" cy="313182"/>
           </a:xfrm>
           <a:prstGeom prst="rect">
@@ -8121,7 +8121,7 @@
         </p:nvSpPr>
         <p:spPr>
           <a:xfrm>
-            <a:off x="694944" y="4899660"/>
+            <a:off x="694944" y="5245989"/>
             <a:ext cx="5135728" cy="751523"/>
           </a:xfrm>
           <a:prstGeom prst="rect">
@@ -8206,12 +8206,12 @@
         </p:nvSpPr>
         <p:spPr>
           <a:xfrm>
-            <a:off x="6196432" y="4403598"/>
-            <a:ext cx="5464912" cy="1806512"/>
+            <a:off x="6196432" y="4749927"/>
+            <a:ext cx="5464912" cy="1605153"/>
           </a:xfrm>
           <a:prstGeom prst="roundRect">
             <a:avLst>
-              <a:gd name="adj" fmla="val 5062"/>
+              <a:gd name="adj" fmla="val 5697"/>
             </a:avLst>
           </a:prstGeom>
           <a:solidFill>
@@ -8240,7 +8240,7 @@
         </p:nvSpPr>
         <p:spPr>
           <a:xfrm>
-            <a:off x="6361024" y="4568190"/>
+            <a:off x="6361024" y="4914519"/>
             <a:ext cx="5135728" cy="313182"/>
           </a:xfrm>
           <a:prstGeom prst="rect">
@@ -8279,7 +8279,7 @@
         </p:nvSpPr>
         <p:spPr>
           <a:xfrm>
-            <a:off x="6361024" y="4899660"/>
+            <a:off x="6361024" y="5245989"/>
             <a:ext cx="5135728" cy="1145858"/>
           </a:xfrm>
           <a:prstGeom prst="rect">
@@ -9896,7 +9896,7 @@
                   </a:tcPr>
                 </a:tc>
               </a:tr>
-              <a:tr h="666369">
+              <a:tr h="762952">
                 <a:tc>
                   <a:txBody>
                     <a:bodyPr/>
@@ -10174,7 +10174,7 @@
                   </a:tcPr>
                 </a:tc>
               </a:tr>
-              <a:tr h="493014">
+              <a:tr h="569595">
                 <a:tc>
                   <a:txBody>
                     <a:bodyPr/>
@@ -10380,7 +10380,7 @@
                   </a:tcPr>
                 </a:tc>
               </a:tr>
-              <a:tr h="319659">
+              <a:tr h="376238">
                 <a:tc>
                   <a:txBody>
                     <a:bodyPr/>
@@ -10586,7 +10586,7 @@
                   </a:tcPr>
                 </a:tc>
               </a:tr>
-              <a:tr h="319659">
+              <a:tr h="376238">
                 <a:tc>
                   <a:txBody>
                     <a:bodyPr/>
@@ -10804,7 +10804,7 @@
         </p:nvSpPr>
         <p:spPr>
           <a:xfrm>
-            <a:off x="530352" y="3883533"/>
+            <a:off x="530352" y="4169855"/>
             <a:ext cx="11130991" cy="566928"/>
           </a:xfrm>
           <a:prstGeom prst="roundRect">
@@ -10831,7 +10831,7 @@
         </p:nvSpPr>
         <p:spPr>
           <a:xfrm>
-            <a:off x="713232" y="3883533"/>
+            <a:off x="713232" y="4169855"/>
             <a:ext cx="10765231" cy="566928"/>
           </a:xfrm>
           <a:prstGeom prst="rect">
@@ -10884,12 +10884,12 @@
         </p:nvSpPr>
         <p:spPr>
           <a:xfrm>
-            <a:off x="530352" y="4615053"/>
-            <a:ext cx="2138416" cy="1005840"/>
+            <a:off x="530352" y="4901375"/>
+            <a:ext cx="2138416" cy="996506"/>
           </a:xfrm>
           <a:prstGeom prst="roundRect">
             <a:avLst>
-              <a:gd name="adj" fmla="val 7273"/>
+              <a:gd name="adj" fmla="val 7341"/>
             </a:avLst>
           </a:prstGeom>
           <a:solidFill>
@@ -10911,8 +10911,8 @@
         </p:nvSpPr>
         <p:spPr>
           <a:xfrm>
-            <a:off x="621792" y="4688205"/>
-            <a:ext cx="1955536" cy="859536"/>
+            <a:off x="621792" y="4974527"/>
+            <a:ext cx="1955536" cy="850202"/>
           </a:xfrm>
           <a:prstGeom prst="rect">
             <a:avLst/>
@@ -10967,12 +10967,12 @@
         </p:nvSpPr>
         <p:spPr>
           <a:xfrm>
-            <a:off x="2778496" y="4615053"/>
-            <a:ext cx="2138416" cy="1005840"/>
+            <a:off x="2778496" y="4901375"/>
+            <a:ext cx="2138416" cy="996506"/>
           </a:xfrm>
           <a:prstGeom prst="roundRect">
             <a:avLst>
-              <a:gd name="adj" fmla="val 7273"/>
+              <a:gd name="adj" fmla="val 7341"/>
             </a:avLst>
           </a:prstGeom>
           <a:solidFill>
@@ -10994,8 +10994,8 @@
         </p:nvSpPr>
         <p:spPr>
           <a:xfrm>
-            <a:off x="2869936" y="4688205"/>
-            <a:ext cx="1955536" cy="859536"/>
+            <a:off x="2869936" y="4974527"/>
+            <a:ext cx="1955536" cy="850202"/>
           </a:xfrm>
           <a:prstGeom prst="rect">
             <a:avLst/>
@@ -11050,12 +11050,12 @@
         </p:nvSpPr>
         <p:spPr>
           <a:xfrm>
-            <a:off x="5026640" y="4615053"/>
-            <a:ext cx="2138416" cy="1005840"/>
+            <a:off x="5026640" y="4901375"/>
+            <a:ext cx="2138416" cy="996506"/>
           </a:xfrm>
           <a:prstGeom prst="roundRect">
             <a:avLst>
-              <a:gd name="adj" fmla="val 7273"/>
+              <a:gd name="adj" fmla="val 7341"/>
             </a:avLst>
           </a:prstGeom>
           <a:solidFill>
@@ -11077,8 +11077,8 @@
         </p:nvSpPr>
         <p:spPr>
           <a:xfrm>
-            <a:off x="5118080" y="4688205"/>
-            <a:ext cx="1955536" cy="859536"/>
+            <a:off x="5118080" y="4974527"/>
+            <a:ext cx="1955536" cy="850202"/>
           </a:xfrm>
           <a:prstGeom prst="rect">
             <a:avLst/>
@@ -11133,12 +11133,12 @@
         </p:nvSpPr>
         <p:spPr>
           <a:xfrm>
-            <a:off x="7274784" y="4615053"/>
-            <a:ext cx="2138416" cy="1005840"/>
+            <a:off x="7274784" y="4901375"/>
+            <a:ext cx="2138416" cy="996506"/>
           </a:xfrm>
           <a:prstGeom prst="roundRect">
             <a:avLst>
-              <a:gd name="adj" fmla="val 7273"/>
+              <a:gd name="adj" fmla="val 7341"/>
             </a:avLst>
           </a:prstGeom>
           <a:solidFill>
@@ -11160,8 +11160,8 @@
         </p:nvSpPr>
         <p:spPr>
           <a:xfrm>
-            <a:off x="7366224" y="4688205"/>
-            <a:ext cx="1955536" cy="859536"/>
+            <a:off x="7366224" y="4974527"/>
+            <a:ext cx="1955536" cy="850202"/>
           </a:xfrm>
           <a:prstGeom prst="rect">
             <a:avLst/>
@@ -11216,12 +11216,12 @@
         </p:nvSpPr>
         <p:spPr>
           <a:xfrm>
-            <a:off x="9522927" y="4615053"/>
-            <a:ext cx="2138416" cy="1005840"/>
+            <a:off x="9522927" y="4901375"/>
+            <a:ext cx="2138416" cy="996506"/>
           </a:xfrm>
           <a:prstGeom prst="roundRect">
             <a:avLst>
-              <a:gd name="adj" fmla="val 7273"/>
+              <a:gd name="adj" fmla="val 7341"/>
             </a:avLst>
           </a:prstGeom>
           <a:solidFill>
@@ -11243,8 +11243,8 @@
         </p:nvSpPr>
         <p:spPr>
           <a:xfrm>
-            <a:off x="9614367" y="4688205"/>
-            <a:ext cx="1955536" cy="859536"/>
+            <a:off x="9614367" y="4974527"/>
+            <a:ext cx="1955536" cy="850202"/>
           </a:xfrm>
           <a:prstGeom prst="rect">
             <a:avLst/>
